--- a/learning/P01_zephyr_make_project/slides/P009_Zephyr的CMake输入与依赖发现_Windows.pptx
+++ b/learning/P01_zephyr_make_project/slides/P009_Zephyr的CMake输入与依赖发现_Windows.pptx
@@ -25609,7 +25609,16 @@
               <a:rPr u="sng">
                 <a:hlinkClick r:id="R2bc768f0bd174fd3"/>
               </a:rPr>
-              <a:t>依据：doc/build/cmake/index.rst</a:t>
+              <a:t>依据：</a:t>
+            </a:r>
+            <a:r>
+              <a:rPr u="sng">
+                <a:solidFill>
+                  <a:srgbClr val="0070C0"/>
+                </a:solidFill>
+                <a:hlinkClick r:id="R2bc768f0bd174fd3"/>
+              </a:rPr>
+              <a:t>doc/build/cmake/index.rst</a:t>
             </a:r>
           </a:p>
         </p:txBody>
@@ -25757,6 +25766,107 @@
               <a:ea typeface="Microsoft YaHei"/>
               <a:cs typeface="Microsoft YaHei"/>
             </a:endParaRPr>
+          </a:p>
+        </p:txBody>
+      </p:sp>
+      <p:sp>
+        <p:nvSpPr>
+          <p:cNvPr id="15" name="Semantic color legend">
+            <a:extLst>
+              <a:ext uri="{FF2B5EF4-FFF2-40B4-BE49-F238E27FC236}">
+                <a16:creationId xmlns:a16="http://schemas.microsoft.com/office/drawing/2014/main" id="{39154CEE-9E0E-4815-8A42-342F49989EDD}"/>
+              </a:ext>
+            </a:extLst>
+          </p:cNvPr>
+          <p:cNvSpPr>
+            <a:spLocks noGrp="1"/>
+          </p:cNvSpPr>
+          <p:nvPr/>
+        </p:nvSpPr>
+        <p:spPr>
+          <a:xfrm>
+            <a:off x="609600" y="5314950"/>
+            <a:ext cx="10972800" cy="342900"/>
+          </a:xfrm>
+          <a:prstGeom prst="rect">
+            <a:avLst/>
+          </a:prstGeom>
+          <a:noFill/>
+          <a:ln w="0">
+            <a:noFill/>
+          </a:ln>
+        </p:spPr>
+        <p:txBody>
+          <a:bodyPr>
+            <a:noAutofit/>
+          </a:bodyPr>
+          <a:lstStyle>
+            <a:defPPr>
+              <a:defRPr sz="1575">
+                <a:solidFill>
+                  <a:srgbClr val="646173"/>
+                </a:solidFill>
+                <a:latin typeface="Microsoft YaHei"/>
+                <a:ea typeface="Microsoft YaHei"/>
+                <a:cs typeface="Microsoft YaHei"/>
+              </a:defRPr>
+            </a:defPPr>
+          </a:lstStyle>
+          <a:p>
+            <a:pPr>
+              <a:defRPr sz="1575">
+                <a:solidFill>
+                  <a:srgbClr val="646173"/>
+                </a:solidFill>
+                <a:latin typeface="Microsoft YaHei"/>
+                <a:ea typeface="Microsoft YaHei"/>
+                <a:cs typeface="Microsoft YaHei"/>
+              </a:defRPr>
+            </a:pPr>
+            <a:r>
+              <a:t>阅读标色： </a:t>
+            </a:r>
+            <a:r>
+              <a:rPr>
+                <a:solidFill>
+                  <a:srgbClr val="B84E00"/>
+                </a:solidFill>
+              </a:rPr>
+              <a:t>变量 / 参数</a:t>
+            </a:r>
+            <a:r>
+              <a:t>     </a:t>
+            </a:r>
+            <a:r>
+              <a:rPr>
+                <a:solidFill>
+                  <a:srgbClr val="0070C0"/>
+                </a:solidFill>
+              </a:rPr>
+              <a:t>文件 / 路径</a:t>
+            </a:r>
+            <a:r>
+              <a:t>     </a:t>
+            </a:r>
+            <a:r>
+              <a:rPr>
+                <a:solidFill>
+                  <a:srgbClr val="087B3D"/>
+                </a:solidFill>
+              </a:rPr>
+              <a:t>接口函数</a:t>
+            </a:r>
+            <a:r>
+              <a:t>     </a:t>
+            </a:r>
+            <a:r>
+              <a:rPr>
+                <a:solidFill>
+                  <a:srgbClr val="A02B93"/>
+                </a:solidFill>
+              </a:rPr>
+              <a:t>终端命令</a:t>
+            </a:r>
           </a:p>
         </p:txBody>
       </p:sp>
@@ -26757,7 +26867,19 @@
                 <a:cs typeface="Microsoft YaHei"/>
                 <a:hlinkClick r:id="rId3"/>
               </a:rPr>
-              <a:t>官方说明：doc/build/cmake/index.rst</a:t>
+              <a:t>官方说明：</a:t>
+            </a:r>
+            <a:r>
+              <a:rPr sz="1275" b="0">
+                <a:solidFill>
+                  <a:srgbClr val="0070C0"/>
+                </a:solidFill>
+                <a:latin typeface="Microsoft YaHei"/>
+                <a:ea typeface="Microsoft YaHei"/>
+                <a:cs typeface="Microsoft YaHei"/>
+                <a:hlinkClick r:id="rId3"/>
+              </a:rPr>
+              <a:t>doc/build/cmake/index.rst</a:t>
             </a:r>
           </a:p>
         </p:txBody>
@@ -26826,7 +26948,31 @@
                 <a:cs typeface="Microsoft YaHei"/>
                 <a:hlinkClick r:id="rId4"/>
               </a:rPr>
-              <a:t>实现定位：cmake/modules/zephyr_default.cmake · 71 行附近</a:t>
+              <a:t>实现定位：</a:t>
+            </a:r>
+            <a:r>
+              <a:rPr sz="1275" b="0">
+                <a:solidFill>
+                  <a:srgbClr val="0070C0"/>
+                </a:solidFill>
+                <a:latin typeface="Microsoft YaHei"/>
+                <a:ea typeface="Microsoft YaHei"/>
+                <a:cs typeface="Microsoft YaHei"/>
+                <a:hlinkClick r:id="rId4"/>
+              </a:rPr>
+              <a:t>cmake/modules/zephyr_default.cmake</a:t>
+            </a:r>
+            <a:r>
+              <a:rPr sz="1275" b="0">
+                <a:solidFill>
+                  <a:srgbClr val="397589"/>
+                </a:solidFill>
+                <a:latin typeface="Microsoft YaHei"/>
+                <a:ea typeface="Microsoft YaHei"/>
+                <a:cs typeface="Microsoft YaHei"/>
+                <a:hlinkClick r:id="rId4"/>
+              </a:rPr>
+              <a:t> · 71 行附近</a:t>
             </a:r>
           </a:p>
         </p:txBody>
@@ -27844,7 +27990,19 @@
                 <a:cs typeface="Microsoft YaHei"/>
                 <a:hlinkClick r:id="rId3"/>
               </a:rPr>
-              <a:t>官方说明：doc/build/cmake-ref/index.rst</a:t>
+              <a:t>官方说明：</a:t>
+            </a:r>
+            <a:r>
+              <a:rPr sz="1275" b="0">
+                <a:solidFill>
+                  <a:srgbClr val="0070C0"/>
+                </a:solidFill>
+                <a:latin typeface="Microsoft YaHei"/>
+                <a:ea typeface="Microsoft YaHei"/>
+                <a:cs typeface="Microsoft YaHei"/>
+                <a:hlinkClick r:id="rId3"/>
+              </a:rPr>
+              <a:t>doc/build/cmake-ref/index.rst</a:t>
             </a:r>
           </a:p>
         </p:txBody>
@@ -27913,7 +28071,31 @@
                 <a:cs typeface="Microsoft YaHei"/>
                 <a:hlinkClick r:id="rId4"/>
               </a:rPr>
-              <a:t>实现定位：cmake/modules/zephyr_module.cmake · 141 行附近</a:t>
+              <a:t>实现定位：</a:t>
+            </a:r>
+            <a:r>
+              <a:rPr sz="1275" b="0">
+                <a:solidFill>
+                  <a:srgbClr val="0070C0"/>
+                </a:solidFill>
+                <a:latin typeface="Microsoft YaHei"/>
+                <a:ea typeface="Microsoft YaHei"/>
+                <a:cs typeface="Microsoft YaHei"/>
+                <a:hlinkClick r:id="rId4"/>
+              </a:rPr>
+              <a:t>cmake/modules/zephyr_module.cmake</a:t>
+            </a:r>
+            <a:r>
+              <a:rPr sz="1275" b="0">
+                <a:solidFill>
+                  <a:srgbClr val="397589"/>
+                </a:solidFill>
+                <a:latin typeface="Microsoft YaHei"/>
+                <a:ea typeface="Microsoft YaHei"/>
+                <a:cs typeface="Microsoft YaHei"/>
+                <a:hlinkClick r:id="rId4"/>
+              </a:rPr>
+              <a:t> · 141 行附近</a:t>
             </a:r>
           </a:p>
         </p:txBody>
@@ -28105,6 +28287,9 @@
           </a:lstStyle>
           <a:p>
             <a:pPr>
+              <a:lnSpc>
+                <a:spcPct val="120000"/>
+              </a:lnSpc>
               <a:defRPr sz="1425">
                 <a:latin typeface="Microsoft YaHei"/>
                 <a:ea typeface="Microsoft YaHei"/>
@@ -28995,7 +29180,19 @@
                 <a:cs typeface="Microsoft YaHei"/>
                 <a:hlinkClick r:id="rId3"/>
               </a:rPr>
-              <a:t>官方说明：doc/build/zephyr_cmake_package.rst</a:t>
+              <a:t>官方说明：</a:t>
+            </a:r>
+            <a:r>
+              <a:rPr sz="1275" b="0">
+                <a:solidFill>
+                  <a:srgbClr val="0070C0"/>
+                </a:solidFill>
+                <a:latin typeface="Microsoft YaHei"/>
+                <a:ea typeface="Microsoft YaHei"/>
+                <a:cs typeface="Microsoft YaHei"/>
+                <a:hlinkClick r:id="rId3"/>
+              </a:rPr>
+              <a:t>doc/build/zephyr_cmake_package.rst</a:t>
             </a:r>
           </a:p>
         </p:txBody>
@@ -29064,7 +29261,31 @@
                 <a:cs typeface="Microsoft YaHei"/>
                 <a:hlinkClick r:id="rId4"/>
               </a:rPr>
-              <a:t>实现定位：share/zephyr-package/cmake/ZephyrConfig.cmake · 28 行附近</a:t>
+              <a:t>实现定位：</a:t>
+            </a:r>
+            <a:r>
+              <a:rPr sz="1275" b="0">
+                <a:solidFill>
+                  <a:srgbClr val="0070C0"/>
+                </a:solidFill>
+                <a:latin typeface="Microsoft YaHei"/>
+                <a:ea typeface="Microsoft YaHei"/>
+                <a:cs typeface="Microsoft YaHei"/>
+                <a:hlinkClick r:id="rId4"/>
+              </a:rPr>
+              <a:t>share/zephyr-package/cmake/ZephyrConfig.cmake</a:t>
+            </a:r>
+            <a:r>
+              <a:rPr sz="1275" b="0">
+                <a:solidFill>
+                  <a:srgbClr val="397589"/>
+                </a:solidFill>
+                <a:latin typeface="Microsoft YaHei"/>
+                <a:ea typeface="Microsoft YaHei"/>
+                <a:cs typeface="Microsoft YaHei"/>
+                <a:hlinkClick r:id="rId4"/>
+              </a:rPr>
+              <a:t> · 28 行附近</a:t>
             </a:r>
           </a:p>
         </p:txBody>
@@ -29700,7 +29921,19 @@
                 <a:cs typeface="Microsoft YaHei"/>
                 <a:hlinkClick r:id="rId3"/>
               </a:rPr>
-              <a:t>官方说明：doc/build/cmake-ref/variable/BOARD.rst</a:t>
+              <a:t>官方说明：</a:t>
+            </a:r>
+            <a:r>
+              <a:rPr sz="1275" b="0">
+                <a:solidFill>
+                  <a:srgbClr val="0070C0"/>
+                </a:solidFill>
+                <a:latin typeface="Microsoft YaHei"/>
+                <a:ea typeface="Microsoft YaHei"/>
+                <a:cs typeface="Microsoft YaHei"/>
+                <a:hlinkClick r:id="rId3"/>
+              </a:rPr>
+              <a:t>doc/build/cmake-ref/variable/BOARD.rst</a:t>
             </a:r>
           </a:p>
         </p:txBody>
@@ -29769,7 +30002,31 @@
                 <a:cs typeface="Microsoft YaHei"/>
                 <a:hlinkClick r:id="rId4"/>
               </a:rPr>
-              <a:t>实现定位：cmake/modules/boards.cmake · 6 行附近</a:t>
+              <a:t>实现定位：</a:t>
+            </a:r>
+            <a:r>
+              <a:rPr sz="1275" b="0">
+                <a:solidFill>
+                  <a:srgbClr val="0070C0"/>
+                </a:solidFill>
+                <a:latin typeface="Microsoft YaHei"/>
+                <a:ea typeface="Microsoft YaHei"/>
+                <a:cs typeface="Microsoft YaHei"/>
+                <a:hlinkClick r:id="rId4"/>
+              </a:rPr>
+              <a:t>cmake/modules/boards.cmake</a:t>
+            </a:r>
+            <a:r>
+              <a:rPr sz="1275" b="0">
+                <a:solidFill>
+                  <a:srgbClr val="397589"/>
+                </a:solidFill>
+                <a:latin typeface="Microsoft YaHei"/>
+                <a:ea typeface="Microsoft YaHei"/>
+                <a:cs typeface="Microsoft YaHei"/>
+                <a:hlinkClick r:id="rId4"/>
+              </a:rPr>
+              <a:t> · 6 行附近</a:t>
             </a:r>
           </a:p>
         </p:txBody>
@@ -30932,7 +31189,19 @@
                 <a:cs typeface="Microsoft YaHei"/>
                 <a:hlinkClick r:id="rId3"/>
               </a:rPr>
-              <a:t>官方说明：doc/build/cmake-ref/variable/CONF_FILE.rst</a:t>
+              <a:t>官方说明：</a:t>
+            </a:r>
+            <a:r>
+              <a:rPr sz="1275" b="0">
+                <a:solidFill>
+                  <a:srgbClr val="0070C0"/>
+                </a:solidFill>
+                <a:latin typeface="Microsoft YaHei"/>
+                <a:ea typeface="Microsoft YaHei"/>
+                <a:cs typeface="Microsoft YaHei"/>
+                <a:hlinkClick r:id="rId3"/>
+              </a:rPr>
+              <a:t>doc/build/cmake-ref/variable/CONF_FILE.rst</a:t>
             </a:r>
           </a:p>
         </p:txBody>
@@ -31001,7 +31270,31 @@
                 <a:cs typeface="Microsoft YaHei"/>
                 <a:hlinkClick r:id="rId4"/>
               </a:rPr>
-              <a:t>实现定位：cmake/modules/configuration_files.cmake · 43 行附近</a:t>
+              <a:t>实现定位：</a:t>
+            </a:r>
+            <a:r>
+              <a:rPr sz="1275" b="0">
+                <a:solidFill>
+                  <a:srgbClr val="0070C0"/>
+                </a:solidFill>
+                <a:latin typeface="Microsoft YaHei"/>
+                <a:ea typeface="Microsoft YaHei"/>
+                <a:cs typeface="Microsoft YaHei"/>
+                <a:hlinkClick r:id="rId4"/>
+              </a:rPr>
+              <a:t>cmake/modules/configuration_files.cmake</a:t>
+            </a:r>
+            <a:r>
+              <a:rPr sz="1275" b="0">
+                <a:solidFill>
+                  <a:srgbClr val="397589"/>
+                </a:solidFill>
+                <a:latin typeface="Microsoft YaHei"/>
+                <a:ea typeface="Microsoft YaHei"/>
+                <a:cs typeface="Microsoft YaHei"/>
+                <a:hlinkClick r:id="rId4"/>
+              </a:rPr>
+              <a:t> · 43 行附近</a:t>
             </a:r>
           </a:p>
         </p:txBody>
@@ -31595,13 +31888,46 @@
             <a:r>
               <a:rPr sz="1950" b="0">
                 <a:solidFill>
-                  <a:srgbClr val="29263B"/>
-                </a:solidFill>
-                <a:latin typeface="Microsoft YaHei"/>
-                <a:ea typeface="Microsoft YaHei"/>
-                <a:cs typeface="Microsoft YaHei"/>
-              </a:rPr>
-              <a:t>dtc 可提供补充诊断；不要把全部生成工作都归给 dtc。</a:t>
+                  <a:srgbClr val="A02B93"/>
+                </a:solidFill>
+                <a:latin typeface="Microsoft YaHei"/>
+                <a:ea typeface="Microsoft YaHei"/>
+                <a:cs typeface="Microsoft YaHei"/>
+              </a:rPr>
+              <a:t>dtc</a:t>
+            </a:r>
+            <a:r>
+              <a:rPr sz="1950" b="0">
+                <a:solidFill>
+                  <a:srgbClr val="29263B"/>
+                </a:solidFill>
+                <a:latin typeface="Microsoft YaHei"/>
+                <a:ea typeface="Microsoft YaHei"/>
+                <a:cs typeface="Microsoft YaHei"/>
+              </a:rPr>
+              <a:t> 可提供补充诊断；不要把全部生成工作都归给 </a:t>
+            </a:r>
+            <a:r>
+              <a:rPr sz="1950" b="0">
+                <a:solidFill>
+                  <a:srgbClr val="A02B93"/>
+                </a:solidFill>
+                <a:latin typeface="Microsoft YaHei"/>
+                <a:ea typeface="Microsoft YaHei"/>
+                <a:cs typeface="Microsoft YaHei"/>
+              </a:rPr>
+              <a:t>dtc</a:t>
+            </a:r>
+            <a:r>
+              <a:rPr sz="1950" b="0">
+                <a:solidFill>
+                  <a:srgbClr val="29263B"/>
+                </a:solidFill>
+                <a:latin typeface="Microsoft YaHei"/>
+                <a:ea typeface="Microsoft YaHei"/>
+                <a:cs typeface="Microsoft YaHei"/>
+              </a:rPr>
+              <a:t>。</a:t>
             </a:r>
           </a:p>
         </p:txBody>
@@ -31670,7 +31996,19 @@
                 <a:cs typeface="Microsoft YaHei"/>
                 <a:hlinkClick r:id="rId3"/>
               </a:rPr>
-              <a:t>官方说明：doc/build/cmake/index.rst</a:t>
+              <a:t>官方说明：</a:t>
+            </a:r>
+            <a:r>
+              <a:rPr sz="1275" b="0">
+                <a:solidFill>
+                  <a:srgbClr val="0070C0"/>
+                </a:solidFill>
+                <a:latin typeface="Microsoft YaHei"/>
+                <a:ea typeface="Microsoft YaHei"/>
+                <a:cs typeface="Microsoft YaHei"/>
+                <a:hlinkClick r:id="rId3"/>
+              </a:rPr>
+              <a:t>doc/build/cmake/index.rst</a:t>
             </a:r>
           </a:p>
         </p:txBody>
@@ -31739,7 +32077,31 @@
                 <a:cs typeface="Microsoft YaHei"/>
                 <a:hlinkClick r:id="rId4"/>
               </a:rPr>
-              <a:t>实现定位：cmake/modules/dts.cmake · 9 行附近</a:t>
+              <a:t>实现定位：</a:t>
+            </a:r>
+            <a:r>
+              <a:rPr sz="1275" b="0">
+                <a:solidFill>
+                  <a:srgbClr val="0070C0"/>
+                </a:solidFill>
+                <a:latin typeface="Microsoft YaHei"/>
+                <a:ea typeface="Microsoft YaHei"/>
+                <a:cs typeface="Microsoft YaHei"/>
+                <a:hlinkClick r:id="rId4"/>
+              </a:rPr>
+              <a:t>cmake/modules/dts.cmake</a:t>
+            </a:r>
+            <a:r>
+              <a:rPr sz="1275" b="0">
+                <a:solidFill>
+                  <a:srgbClr val="397589"/>
+                </a:solidFill>
+                <a:latin typeface="Microsoft YaHei"/>
+                <a:ea typeface="Microsoft YaHei"/>
+                <a:cs typeface="Microsoft YaHei"/>
+                <a:hlinkClick r:id="rId4"/>
+              </a:rPr>
+              <a:t> · 9 行附近</a:t>
             </a:r>
           </a:p>
         </p:txBody>
@@ -32661,7 +33023,19 @@
                 <a:cs typeface="Microsoft YaHei"/>
                 <a:hlinkClick r:id="rId3"/>
               </a:rPr>
-              <a:t>官方说明：doc/build/cmake-ref/variable/BOARD.rst</a:t>
+              <a:t>官方说明：</a:t>
+            </a:r>
+            <a:r>
+              <a:rPr sz="1275" b="0">
+                <a:solidFill>
+                  <a:srgbClr val="0070C0"/>
+                </a:solidFill>
+                <a:latin typeface="Microsoft YaHei"/>
+                <a:ea typeface="Microsoft YaHei"/>
+                <a:cs typeface="Microsoft YaHei"/>
+                <a:hlinkClick r:id="rId3"/>
+              </a:rPr>
+              <a:t>doc/build/cmake-ref/variable/BOARD.rst</a:t>
             </a:r>
           </a:p>
         </p:txBody>
@@ -32730,7 +33104,31 @@
                 <a:cs typeface="Microsoft YaHei"/>
                 <a:hlinkClick r:id="rId4"/>
               </a:rPr>
-              <a:t>实现定位：cmake/modules/boards.cmake · 6 行附近</a:t>
+              <a:t>实现定位：</a:t>
+            </a:r>
+            <a:r>
+              <a:rPr sz="1275" b="0">
+                <a:solidFill>
+                  <a:srgbClr val="0070C0"/>
+                </a:solidFill>
+                <a:latin typeface="Microsoft YaHei"/>
+                <a:ea typeface="Microsoft YaHei"/>
+                <a:cs typeface="Microsoft YaHei"/>
+                <a:hlinkClick r:id="rId4"/>
+              </a:rPr>
+              <a:t>cmake/modules/boards.cmake</a:t>
+            </a:r>
+            <a:r>
+              <a:rPr sz="1275" b="0">
+                <a:solidFill>
+                  <a:srgbClr val="397589"/>
+                </a:solidFill>
+                <a:latin typeface="Microsoft YaHei"/>
+                <a:ea typeface="Microsoft YaHei"/>
+                <a:cs typeface="Microsoft YaHei"/>
+                <a:hlinkClick r:id="rId4"/>
+              </a:rPr>
+              <a:t> · 6 行附近</a:t>
             </a:r>
           </a:p>
         </p:txBody>
@@ -33652,7 +34050,19 @@
                 <a:cs typeface="Microsoft YaHei"/>
                 <a:hlinkClick r:id="rId3"/>
               </a:rPr>
-              <a:t>官方说明：doc/develop/toolchains/zephyr_sdk.rst</a:t>
+              <a:t>官方说明：</a:t>
+            </a:r>
+            <a:r>
+              <a:rPr sz="1275" b="0">
+                <a:solidFill>
+                  <a:srgbClr val="0070C0"/>
+                </a:solidFill>
+                <a:latin typeface="Microsoft YaHei"/>
+                <a:ea typeface="Microsoft YaHei"/>
+                <a:cs typeface="Microsoft YaHei"/>
+                <a:hlinkClick r:id="rId3"/>
+              </a:rPr>
+              <a:t>doc/develop/toolchains/zephyr_sdk.rst</a:t>
             </a:r>
           </a:p>
         </p:txBody>
@@ -33721,7 +34131,31 @@
                 <a:cs typeface="Microsoft YaHei"/>
                 <a:hlinkClick r:id="rId4"/>
               </a:rPr>
-              <a:t>实现定位：cmake/modules/FindHostTools.cmake · 51 行附近</a:t>
+              <a:t>实现定位：</a:t>
+            </a:r>
+            <a:r>
+              <a:rPr sz="1275" b="0">
+                <a:solidFill>
+                  <a:srgbClr val="0070C0"/>
+                </a:solidFill>
+                <a:latin typeface="Microsoft YaHei"/>
+                <a:ea typeface="Microsoft YaHei"/>
+                <a:cs typeface="Microsoft YaHei"/>
+                <a:hlinkClick r:id="rId4"/>
+              </a:rPr>
+              <a:t>cmake/modules/FindHostTools.cmake</a:t>
+            </a:r>
+            <a:r>
+              <a:rPr sz="1275" b="0">
+                <a:solidFill>
+                  <a:srgbClr val="397589"/>
+                </a:solidFill>
+                <a:latin typeface="Microsoft YaHei"/>
+                <a:ea typeface="Microsoft YaHei"/>
+                <a:cs typeface="Microsoft YaHei"/>
+                <a:hlinkClick r:id="rId4"/>
+              </a:rPr>
+              <a:t> · 51 行附近</a:t>
             </a:r>
           </a:p>
         </p:txBody>
@@ -34785,7 +35219,19 @@
                 <a:cs typeface="Microsoft YaHei"/>
                 <a:hlinkClick r:id="rId3"/>
               </a:rPr>
-              <a:t>官方说明：doc/develop/toolchains/zephyr_sdk.rst</a:t>
+              <a:t>官方说明：</a:t>
+            </a:r>
+            <a:r>
+              <a:rPr sz="1275" b="0">
+                <a:solidFill>
+                  <a:srgbClr val="0070C0"/>
+                </a:solidFill>
+                <a:latin typeface="Microsoft YaHei"/>
+                <a:ea typeface="Microsoft YaHei"/>
+                <a:cs typeface="Microsoft YaHei"/>
+                <a:hlinkClick r:id="rId3"/>
+              </a:rPr>
+              <a:t>doc/develop/toolchains/zephyr_sdk.rst</a:t>
             </a:r>
           </a:p>
         </p:txBody>
@@ -34854,7 +35300,31 @@
                 <a:cs typeface="Microsoft YaHei"/>
                 <a:hlinkClick r:id="rId4"/>
               </a:rPr>
-              <a:t>实现定位：cmake/modules/FindZephyr-sdk.cmake · 44 行附近</a:t>
+              <a:t>实现定位：</a:t>
+            </a:r>
+            <a:r>
+              <a:rPr sz="1275" b="0">
+                <a:solidFill>
+                  <a:srgbClr val="0070C0"/>
+                </a:solidFill>
+                <a:latin typeface="Microsoft YaHei"/>
+                <a:ea typeface="Microsoft YaHei"/>
+                <a:cs typeface="Microsoft YaHei"/>
+                <a:hlinkClick r:id="rId4"/>
+              </a:rPr>
+              <a:t>cmake/modules/FindZephyr-sdk.cmake</a:t>
+            </a:r>
+            <a:r>
+              <a:rPr sz="1275" b="0">
+                <a:solidFill>
+                  <a:srgbClr val="397589"/>
+                </a:solidFill>
+                <a:latin typeface="Microsoft YaHei"/>
+                <a:ea typeface="Microsoft YaHei"/>
+                <a:cs typeface="Microsoft YaHei"/>
+                <a:hlinkClick r:id="rId4"/>
+              </a:rPr>
+              <a:t> · 44 行附近</a:t>
             </a:r>
           </a:p>
         </p:txBody>
@@ -35479,7 +35949,19 @@
                 <a:cs typeface="Microsoft YaHei"/>
                 <a:hlinkClick r:id="rId3"/>
               </a:rPr>
-              <a:t>官方说明：doc/develop/toolchains/custom_cmake.rst</a:t>
+              <a:t>官方说明：</a:t>
+            </a:r>
+            <a:r>
+              <a:rPr sz="1275" b="0">
+                <a:solidFill>
+                  <a:srgbClr val="0070C0"/>
+                </a:solidFill>
+                <a:latin typeface="Microsoft YaHei"/>
+                <a:ea typeface="Microsoft YaHei"/>
+                <a:cs typeface="Microsoft YaHei"/>
+                <a:hlinkClick r:id="rId3"/>
+              </a:rPr>
+              <a:t>doc/develop/toolchains/custom_cmake.rst</a:t>
             </a:r>
           </a:p>
         </p:txBody>
@@ -35548,7 +36030,31 @@
                 <a:cs typeface="Microsoft YaHei"/>
                 <a:hlinkClick r:id="rId4"/>
               </a:rPr>
-              <a:t>实现定位：cmake/modules/FindHostTools.cmake · 51 行附近</a:t>
+              <a:t>实现定位：</a:t>
+            </a:r>
+            <a:r>
+              <a:rPr sz="1275" b="0">
+                <a:solidFill>
+                  <a:srgbClr val="0070C0"/>
+                </a:solidFill>
+                <a:latin typeface="Microsoft YaHei"/>
+                <a:ea typeface="Microsoft YaHei"/>
+                <a:cs typeface="Microsoft YaHei"/>
+                <a:hlinkClick r:id="rId4"/>
+              </a:rPr>
+              <a:t>cmake/modules/FindHostTools.cmake</a:t>
+            </a:r>
+            <a:r>
+              <a:rPr sz="1275" b="0">
+                <a:solidFill>
+                  <a:srgbClr val="397589"/>
+                </a:solidFill>
+                <a:latin typeface="Microsoft YaHei"/>
+                <a:ea typeface="Microsoft YaHei"/>
+                <a:cs typeface="Microsoft YaHei"/>
+                <a:hlinkClick r:id="rId4"/>
+              </a:rPr>
+              <a:t> · 51 行附近</a:t>
             </a:r>
           </a:p>
         </p:txBody>
@@ -36645,7 +37151,19 @@
                 <a:cs typeface="Microsoft YaHei"/>
                 <a:hlinkClick r:id="rId3"/>
               </a:rPr>
-              <a:t>官方说明：doc/develop/toolchains/zephyr_sdk.rst</a:t>
+              <a:t>官方说明：</a:t>
+            </a:r>
+            <a:r>
+              <a:rPr sz="1275" b="0">
+                <a:solidFill>
+                  <a:srgbClr val="0070C0"/>
+                </a:solidFill>
+                <a:latin typeface="Microsoft YaHei"/>
+                <a:ea typeface="Microsoft YaHei"/>
+                <a:cs typeface="Microsoft YaHei"/>
+                <a:hlinkClick r:id="rId3"/>
+              </a:rPr>
+              <a:t>doc/develop/toolchains/zephyr_sdk.rst</a:t>
             </a:r>
           </a:p>
         </p:txBody>
@@ -36714,7 +37232,31 @@
                 <a:cs typeface="Microsoft YaHei"/>
                 <a:hlinkClick r:id="rId4"/>
               </a:rPr>
-              <a:t>实现定位：cmake/compiler/gcc/target_arm.cmake · 5 行附近</a:t>
+              <a:t>实现定位：</a:t>
+            </a:r>
+            <a:r>
+              <a:rPr sz="1275" b="0">
+                <a:solidFill>
+                  <a:srgbClr val="0070C0"/>
+                </a:solidFill>
+                <a:latin typeface="Microsoft YaHei"/>
+                <a:ea typeface="Microsoft YaHei"/>
+                <a:cs typeface="Microsoft YaHei"/>
+                <a:hlinkClick r:id="rId4"/>
+              </a:rPr>
+              <a:t>cmake/compiler/gcc/target_arm.cmake</a:t>
+            </a:r>
+            <a:r>
+              <a:rPr sz="1275" b="0">
+                <a:solidFill>
+                  <a:srgbClr val="397589"/>
+                </a:solidFill>
+                <a:latin typeface="Microsoft YaHei"/>
+                <a:ea typeface="Microsoft YaHei"/>
+                <a:cs typeface="Microsoft YaHei"/>
+                <a:hlinkClick r:id="rId4"/>
+              </a:rPr>
+              <a:t> · 5 行附近</a:t>
             </a:r>
           </a:p>
         </p:txBody>
@@ -37306,7 +37848,19 @@
                 <a:cs typeface="Microsoft YaHei"/>
                 <a:hlinkClick r:id="rId3"/>
               </a:rPr>
-              <a:t>官方说明：doc/develop/toolchains/other_x_compilers.rst</a:t>
+              <a:t>官方说明：</a:t>
+            </a:r>
+            <a:r>
+              <a:rPr sz="1275" b="0">
+                <a:solidFill>
+                  <a:srgbClr val="0070C0"/>
+                </a:solidFill>
+                <a:latin typeface="Microsoft YaHei"/>
+                <a:ea typeface="Microsoft YaHei"/>
+                <a:cs typeface="Microsoft YaHei"/>
+                <a:hlinkClick r:id="rId3"/>
+              </a:rPr>
+              <a:t>doc/develop/toolchains/other_x_compilers.rst</a:t>
             </a:r>
           </a:p>
         </p:txBody>
@@ -37375,7 +37929,31 @@
                 <a:cs typeface="Microsoft YaHei"/>
                 <a:hlinkClick r:id="rId4"/>
               </a:rPr>
-              <a:t>实现定位：cmake/modules/FindZephyr-sdk.cmake · 44 行附近</a:t>
+              <a:t>实现定位：</a:t>
+            </a:r>
+            <a:r>
+              <a:rPr sz="1275" b="0">
+                <a:solidFill>
+                  <a:srgbClr val="0070C0"/>
+                </a:solidFill>
+                <a:latin typeface="Microsoft YaHei"/>
+                <a:ea typeface="Microsoft YaHei"/>
+                <a:cs typeface="Microsoft YaHei"/>
+                <a:hlinkClick r:id="rId4"/>
+              </a:rPr>
+              <a:t>cmake/modules/FindZephyr-sdk.cmake</a:t>
+            </a:r>
+            <a:r>
+              <a:rPr sz="1275" b="0">
+                <a:solidFill>
+                  <a:srgbClr val="397589"/>
+                </a:solidFill>
+                <a:latin typeface="Microsoft YaHei"/>
+                <a:ea typeface="Microsoft YaHei"/>
+                <a:cs typeface="Microsoft YaHei"/>
+                <a:hlinkClick r:id="rId4"/>
+              </a:rPr>
+              <a:t> · 44 行附近</a:t>
             </a:r>
           </a:p>
         </p:txBody>
@@ -39061,7 +39639,19 @@
                 <a:cs typeface="Microsoft YaHei"/>
                 <a:hlinkClick r:id="rId3"/>
               </a:rPr>
-              <a:t>官方说明：doc/build/cmake/index.rst</a:t>
+              <a:t>官方说明：</a:t>
+            </a:r>
+            <a:r>
+              <a:rPr sz="1275" b="0">
+                <a:solidFill>
+                  <a:srgbClr val="0070C0"/>
+                </a:solidFill>
+                <a:latin typeface="Microsoft YaHei"/>
+                <a:ea typeface="Microsoft YaHei"/>
+                <a:cs typeface="Microsoft YaHei"/>
+                <a:hlinkClick r:id="rId3"/>
+              </a:rPr>
+              <a:t>doc/build/cmake/index.rst</a:t>
             </a:r>
           </a:p>
         </p:txBody>
@@ -39130,7 +39720,31 @@
                 <a:cs typeface="Microsoft YaHei"/>
                 <a:hlinkClick r:id="rId4"/>
               </a:rPr>
-              <a:t>实现定位：cmake/modules/zephyr_default.cmake · 71 行附近</a:t>
+              <a:t>实现定位：</a:t>
+            </a:r>
+            <a:r>
+              <a:rPr sz="1275" b="0">
+                <a:solidFill>
+                  <a:srgbClr val="0070C0"/>
+                </a:solidFill>
+                <a:latin typeface="Microsoft YaHei"/>
+                <a:ea typeface="Microsoft YaHei"/>
+                <a:cs typeface="Microsoft YaHei"/>
+                <a:hlinkClick r:id="rId4"/>
+              </a:rPr>
+              <a:t>cmake/modules/zephyr_default.cmake</a:t>
+            </a:r>
+            <a:r>
+              <a:rPr sz="1275" b="0">
+                <a:solidFill>
+                  <a:srgbClr val="397589"/>
+                </a:solidFill>
+                <a:latin typeface="Microsoft YaHei"/>
+                <a:ea typeface="Microsoft YaHei"/>
+                <a:cs typeface="Microsoft YaHei"/>
+                <a:hlinkClick r:id="rId4"/>
+              </a:rPr>
+              <a:t> · 71 行附近</a:t>
             </a:r>
           </a:p>
         </p:txBody>
@@ -39788,7 +40402,19 @@
                 <a:cs typeface="Microsoft YaHei"/>
                 <a:hlinkClick r:id="rId3"/>
               </a:rPr>
-              <a:t>官方说明：doc/develop/toolchains/custom_cmake.rst</a:t>
+              <a:t>官方说明：</a:t>
+            </a:r>
+            <a:r>
+              <a:rPr sz="1275" b="0">
+                <a:solidFill>
+                  <a:srgbClr val="0070C0"/>
+                </a:solidFill>
+                <a:latin typeface="Microsoft YaHei"/>
+                <a:ea typeface="Microsoft YaHei"/>
+                <a:cs typeface="Microsoft YaHei"/>
+                <a:hlinkClick r:id="rId3"/>
+              </a:rPr>
+              <a:t>doc/develop/toolchains/custom_cmake.rst</a:t>
             </a:r>
           </a:p>
         </p:txBody>
@@ -39857,7 +40483,31 @@
                 <a:cs typeface="Microsoft YaHei"/>
                 <a:hlinkClick r:id="rId4"/>
               </a:rPr>
-              <a:t>实现定位：cmake/modules/FindTargetTools.cmake · 30 行附近</a:t>
+              <a:t>实现定位：</a:t>
+            </a:r>
+            <a:r>
+              <a:rPr sz="1275" b="0">
+                <a:solidFill>
+                  <a:srgbClr val="0070C0"/>
+                </a:solidFill>
+                <a:latin typeface="Microsoft YaHei"/>
+                <a:ea typeface="Microsoft YaHei"/>
+                <a:cs typeface="Microsoft YaHei"/>
+                <a:hlinkClick r:id="rId4"/>
+              </a:rPr>
+              <a:t>cmake/modules/FindTargetTools.cmake</a:t>
+            </a:r>
+            <a:r>
+              <a:rPr sz="1275" b="0">
+                <a:solidFill>
+                  <a:srgbClr val="397589"/>
+                </a:solidFill>
+                <a:latin typeface="Microsoft YaHei"/>
+                <a:ea typeface="Microsoft YaHei"/>
+                <a:cs typeface="Microsoft YaHei"/>
+                <a:hlinkClick r:id="rId4"/>
+              </a:rPr>
+              <a:t> · 30 行附近</a:t>
             </a:r>
           </a:p>
         </p:txBody>
@@ -40515,7 +41165,19 @@
                 <a:cs typeface="Microsoft YaHei"/>
                 <a:hlinkClick r:id="rId3"/>
               </a:rPr>
-              <a:t>官方说明：doc/develop/modules.rst</a:t>
+              <a:t>官方说明：</a:t>
+            </a:r>
+            <a:r>
+              <a:rPr sz="1275" b="0">
+                <a:solidFill>
+                  <a:srgbClr val="0070C0"/>
+                </a:solidFill>
+                <a:latin typeface="Microsoft YaHei"/>
+                <a:ea typeface="Microsoft YaHei"/>
+                <a:cs typeface="Microsoft YaHei"/>
+                <a:hlinkClick r:id="rId3"/>
+              </a:rPr>
+              <a:t>doc/develop/modules.rst</a:t>
             </a:r>
           </a:p>
         </p:txBody>
@@ -40584,7 +41246,31 @@
                 <a:cs typeface="Microsoft YaHei"/>
                 <a:hlinkClick r:id="rId4"/>
               </a:rPr>
-              <a:t>实现定位：cmake/modules/zephyr_module.cmake · 34 行附近</a:t>
+              <a:t>实现定位：</a:t>
+            </a:r>
+            <a:r>
+              <a:rPr sz="1275" b="0">
+                <a:solidFill>
+                  <a:srgbClr val="0070C0"/>
+                </a:solidFill>
+                <a:latin typeface="Microsoft YaHei"/>
+                <a:ea typeface="Microsoft YaHei"/>
+                <a:cs typeface="Microsoft YaHei"/>
+                <a:hlinkClick r:id="rId4"/>
+              </a:rPr>
+              <a:t>cmake/modules/zephyr_module.cmake</a:t>
+            </a:r>
+            <a:r>
+              <a:rPr sz="1275" b="0">
+                <a:solidFill>
+                  <a:srgbClr val="397589"/>
+                </a:solidFill>
+                <a:latin typeface="Microsoft YaHei"/>
+                <a:ea typeface="Microsoft YaHei"/>
+                <a:cs typeface="Microsoft YaHei"/>
+                <a:hlinkClick r:id="rId4"/>
+              </a:rPr>
+              <a:t> · 34 行附近</a:t>
             </a:r>
           </a:p>
         </p:txBody>
@@ -41220,7 +41906,19 @@
                 <a:cs typeface="Microsoft YaHei"/>
                 <a:hlinkClick r:id="rId3"/>
               </a:rPr>
-              <a:t>官方说明：doc/develop/modules.rst</a:t>
+              <a:t>官方说明：</a:t>
+            </a:r>
+            <a:r>
+              <a:rPr sz="1275" b="0">
+                <a:solidFill>
+                  <a:srgbClr val="0070C0"/>
+                </a:solidFill>
+                <a:latin typeface="Microsoft YaHei"/>
+                <a:ea typeface="Microsoft YaHei"/>
+                <a:cs typeface="Microsoft YaHei"/>
+                <a:hlinkClick r:id="rId3"/>
+              </a:rPr>
+              <a:t>doc/develop/modules.rst</a:t>
             </a:r>
           </a:p>
         </p:txBody>
@@ -41289,7 +41987,31 @@
                 <a:cs typeface="Microsoft YaHei"/>
                 <a:hlinkClick r:id="rId4"/>
               </a:rPr>
-              <a:t>实现定位：cmake/modules/zephyr_module.cmake · 34 行附近</a:t>
+              <a:t>实现定位：</a:t>
+            </a:r>
+            <a:r>
+              <a:rPr sz="1275" b="0">
+                <a:solidFill>
+                  <a:srgbClr val="0070C0"/>
+                </a:solidFill>
+                <a:latin typeface="Microsoft YaHei"/>
+                <a:ea typeface="Microsoft YaHei"/>
+                <a:cs typeface="Microsoft YaHei"/>
+                <a:hlinkClick r:id="rId4"/>
+              </a:rPr>
+              <a:t>cmake/modules/zephyr_module.cmake</a:t>
+            </a:r>
+            <a:r>
+              <a:rPr sz="1275" b="0">
+                <a:solidFill>
+                  <a:srgbClr val="397589"/>
+                </a:solidFill>
+                <a:latin typeface="Microsoft YaHei"/>
+                <a:ea typeface="Microsoft YaHei"/>
+                <a:cs typeface="Microsoft YaHei"/>
+                <a:hlinkClick r:id="rId4"/>
+              </a:rPr>
+              <a:t> · 34 行附近</a:t>
             </a:r>
           </a:p>
         </p:txBody>
@@ -41673,7 +42395,7 @@
             <a:r>
               <a:rPr sz="1800" b="0">
                 <a:solidFill>
-                  <a:srgbClr val="29263B"/>
+                  <a:srgbClr val="646173"/>
                 </a:solidFill>
                 <a:latin typeface="Consolas"/>
                 <a:ea typeface="Consolas"/>
@@ -41684,7 +42406,7 @@
             <a:r>
               <a:rPr sz="1800" b="0">
                 <a:solidFill>
-                  <a:srgbClr val="0070C0"/>
+                  <a:srgbClr val="646173"/>
                 </a:solidFill>
                 <a:latin typeface="Consolas"/>
                 <a:ea typeface="Consolas"/>
@@ -41695,7 +42417,7 @@
             <a:r>
               <a:rPr sz="1800" b="0">
                 <a:solidFill>
-                  <a:srgbClr val="29263B"/>
+                  <a:srgbClr val="646173"/>
                 </a:solidFill>
                 <a:latin typeface="Consolas"/>
                 <a:ea typeface="Consolas"/>
@@ -42118,7 +42840,19 @@
                 <a:cs typeface="Microsoft YaHei"/>
                 <a:hlinkClick r:id="rId3"/>
               </a:rPr>
-              <a:t>官方说明：doc/develop/modules.rst</a:t>
+              <a:t>官方说明：</a:t>
+            </a:r>
+            <a:r>
+              <a:rPr sz="1275" b="0">
+                <a:solidFill>
+                  <a:srgbClr val="0070C0"/>
+                </a:solidFill>
+                <a:latin typeface="Microsoft YaHei"/>
+                <a:ea typeface="Microsoft YaHei"/>
+                <a:cs typeface="Microsoft YaHei"/>
+                <a:hlinkClick r:id="rId3"/>
+              </a:rPr>
+              <a:t>doc/develop/modules.rst</a:t>
             </a:r>
           </a:p>
         </p:txBody>
@@ -42187,7 +42921,31 @@
                 <a:cs typeface="Microsoft YaHei"/>
                 <a:hlinkClick r:id="rId4"/>
               </a:rPr>
-              <a:t>实现定位：modules/modules.cmake · 5 行附近</a:t>
+              <a:t>实现定位：</a:t>
+            </a:r>
+            <a:r>
+              <a:rPr sz="1275" b="0">
+                <a:solidFill>
+                  <a:srgbClr val="0070C0"/>
+                </a:solidFill>
+                <a:latin typeface="Microsoft YaHei"/>
+                <a:ea typeface="Microsoft YaHei"/>
+                <a:cs typeface="Microsoft YaHei"/>
+                <a:hlinkClick r:id="rId4"/>
+              </a:rPr>
+              <a:t>modules/modules.cmake</a:t>
+            </a:r>
+            <a:r>
+              <a:rPr sz="1275" b="0">
+                <a:solidFill>
+                  <a:srgbClr val="397589"/>
+                </a:solidFill>
+                <a:latin typeface="Microsoft YaHei"/>
+                <a:ea typeface="Microsoft YaHei"/>
+                <a:cs typeface="Microsoft YaHei"/>
+                <a:hlinkClick r:id="rId4"/>
+              </a:rPr>
+              <a:t> · 5 行附近</a:t>
             </a:r>
           </a:p>
         </p:txBody>
@@ -42878,7 +43636,19 @@
                 <a:cs typeface="Microsoft YaHei"/>
                 <a:hlinkClick r:id="rId3"/>
               </a:rPr>
-              <a:t>官方说明：doc/develop/modules.rst</a:t>
+              <a:t>官方说明：</a:t>
+            </a:r>
+            <a:r>
+              <a:rPr sz="1275" b="0">
+                <a:solidFill>
+                  <a:srgbClr val="0070C0"/>
+                </a:solidFill>
+                <a:latin typeface="Microsoft YaHei"/>
+                <a:ea typeface="Microsoft YaHei"/>
+                <a:cs typeface="Microsoft YaHei"/>
+                <a:hlinkClick r:id="rId3"/>
+              </a:rPr>
+              <a:t>doc/develop/modules.rst</a:t>
             </a:r>
           </a:p>
         </p:txBody>
@@ -42947,7 +43717,31 @@
                 <a:cs typeface="Microsoft YaHei"/>
                 <a:hlinkClick r:id="rId4"/>
               </a:rPr>
-              <a:t>实现定位：modules/cmsis_6/CMakeLists.txt · 4 行附近</a:t>
+              <a:t>实现定位：</a:t>
+            </a:r>
+            <a:r>
+              <a:rPr sz="1275" b="0">
+                <a:solidFill>
+                  <a:srgbClr val="0070C0"/>
+                </a:solidFill>
+                <a:latin typeface="Microsoft YaHei"/>
+                <a:ea typeface="Microsoft YaHei"/>
+                <a:cs typeface="Microsoft YaHei"/>
+                <a:hlinkClick r:id="rId4"/>
+              </a:rPr>
+              <a:t>modules/cmsis_6/CMakeLists.txt</a:t>
+            </a:r>
+            <a:r>
+              <a:rPr sz="1275" b="0">
+                <a:solidFill>
+                  <a:srgbClr val="397589"/>
+                </a:solidFill>
+                <a:latin typeface="Microsoft YaHei"/>
+                <a:ea typeface="Microsoft YaHei"/>
+                <a:cs typeface="Microsoft YaHei"/>
+                <a:hlinkClick r:id="rId4"/>
+              </a:rPr>
+              <a:t> · 4 行附近</a:t>
             </a:r>
           </a:p>
         </p:txBody>
@@ -44055,7 +44849,19 @@
                 <a:cs typeface="Microsoft YaHei"/>
                 <a:hlinkClick r:id="rId3"/>
               </a:rPr>
-              <a:t>官方说明：doc/develop/modules.rst</a:t>
+              <a:t>官方说明：</a:t>
+            </a:r>
+            <a:r>
+              <a:rPr sz="1275" b="0">
+                <a:solidFill>
+                  <a:srgbClr val="0070C0"/>
+                </a:solidFill>
+                <a:latin typeface="Microsoft YaHei"/>
+                <a:ea typeface="Microsoft YaHei"/>
+                <a:cs typeface="Microsoft YaHei"/>
+                <a:hlinkClick r:id="rId3"/>
+              </a:rPr>
+              <a:t>doc/develop/modules.rst</a:t>
             </a:r>
           </a:p>
         </p:txBody>
@@ -44124,7 +44930,31 @@
                 <a:cs typeface="Microsoft YaHei"/>
                 <a:hlinkClick r:id="rId4"/>
               </a:rPr>
-              <a:t>实现定位：cmake/modules/zephyr_module.cmake · 141 行附近</a:t>
+              <a:t>实现定位：</a:t>
+            </a:r>
+            <a:r>
+              <a:rPr sz="1275" b="0">
+                <a:solidFill>
+                  <a:srgbClr val="0070C0"/>
+                </a:solidFill>
+                <a:latin typeface="Microsoft YaHei"/>
+                <a:ea typeface="Microsoft YaHei"/>
+                <a:cs typeface="Microsoft YaHei"/>
+                <a:hlinkClick r:id="rId4"/>
+              </a:rPr>
+              <a:t>cmake/modules/zephyr_module.cmake</a:t>
+            </a:r>
+            <a:r>
+              <a:rPr sz="1275" b="0">
+                <a:solidFill>
+                  <a:srgbClr val="397589"/>
+                </a:solidFill>
+                <a:latin typeface="Microsoft YaHei"/>
+                <a:ea typeface="Microsoft YaHei"/>
+                <a:cs typeface="Microsoft YaHei"/>
+                <a:hlinkClick r:id="rId4"/>
+              </a:rPr>
+              <a:t> · 141 行附近</a:t>
             </a:r>
           </a:p>
         </p:txBody>
@@ -45869,7 +46699,19 @@
                 <a:cs typeface="Microsoft YaHei"/>
                 <a:hlinkClick r:id="rId3"/>
               </a:rPr>
-              <a:t>官方说明：doc/develop/modules.rst</a:t>
+              <a:t>官方说明：</a:t>
+            </a:r>
+            <a:r>
+              <a:rPr sz="1275" b="0">
+                <a:solidFill>
+                  <a:srgbClr val="0070C0"/>
+                </a:solidFill>
+                <a:latin typeface="Microsoft YaHei"/>
+                <a:ea typeface="Microsoft YaHei"/>
+                <a:cs typeface="Microsoft YaHei"/>
+                <a:hlinkClick r:id="rId3"/>
+              </a:rPr>
+              <a:t>doc/develop/modules.rst</a:t>
             </a:r>
           </a:p>
         </p:txBody>
@@ -45938,7 +46780,31 @@
                 <a:cs typeface="Microsoft YaHei"/>
                 <a:hlinkClick r:id="rId4"/>
               </a:rPr>
-              <a:t>实现定位：cmake/modules/zephyr_module.cmake · 34 行附近</a:t>
+              <a:t>实现定位：</a:t>
+            </a:r>
+            <a:r>
+              <a:rPr sz="1275" b="0">
+                <a:solidFill>
+                  <a:srgbClr val="0070C0"/>
+                </a:solidFill>
+                <a:latin typeface="Microsoft YaHei"/>
+                <a:ea typeface="Microsoft YaHei"/>
+                <a:cs typeface="Microsoft YaHei"/>
+                <a:hlinkClick r:id="rId4"/>
+              </a:rPr>
+              <a:t>cmake/modules/zephyr_module.cmake</a:t>
+            </a:r>
+            <a:r>
+              <a:rPr sz="1275" b="0">
+                <a:solidFill>
+                  <a:srgbClr val="397589"/>
+                </a:solidFill>
+                <a:latin typeface="Microsoft YaHei"/>
+                <a:ea typeface="Microsoft YaHei"/>
+                <a:cs typeface="Microsoft YaHei"/>
+                <a:hlinkClick r:id="rId4"/>
+              </a:rPr>
+              <a:t> · 34 行附近</a:t>
             </a:r>
           </a:p>
         </p:txBody>
@@ -46618,7 +47484,19 @@
                 <a:cs typeface="Microsoft YaHei"/>
                 <a:hlinkClick r:id="rId3"/>
               </a:rPr>
-              <a:t>官方说明：doc/build/cmake-ref/module/extensions.rst</a:t>
+              <a:t>官方说明：</a:t>
+            </a:r>
+            <a:r>
+              <a:rPr sz="1275" b="0">
+                <a:solidFill>
+                  <a:srgbClr val="0070C0"/>
+                </a:solidFill>
+                <a:latin typeface="Microsoft YaHei"/>
+                <a:ea typeface="Microsoft YaHei"/>
+                <a:cs typeface="Microsoft YaHei"/>
+                <a:hlinkClick r:id="rId3"/>
+              </a:rPr>
+              <a:t>doc/build/cmake-ref/module/extensions.rst</a:t>
             </a:r>
           </a:p>
         </p:txBody>
@@ -46687,7 +47565,31 @@
                 <a:cs typeface="Microsoft YaHei"/>
                 <a:hlinkClick r:id="rId4"/>
               </a:rPr>
-              <a:t>实现定位：cmake/modules/extensions.cmake · 682 行附近</a:t>
+              <a:t>实现定位：</a:t>
+            </a:r>
+            <a:r>
+              <a:rPr sz="1275" b="0">
+                <a:solidFill>
+                  <a:srgbClr val="0070C0"/>
+                </a:solidFill>
+                <a:latin typeface="Microsoft YaHei"/>
+                <a:ea typeface="Microsoft YaHei"/>
+                <a:cs typeface="Microsoft YaHei"/>
+                <a:hlinkClick r:id="rId4"/>
+              </a:rPr>
+              <a:t>cmake/modules/extensions.cmake</a:t>
+            </a:r>
+            <a:r>
+              <a:rPr sz="1275" b="0">
+                <a:solidFill>
+                  <a:srgbClr val="397589"/>
+                </a:solidFill>
+                <a:latin typeface="Microsoft YaHei"/>
+                <a:ea typeface="Microsoft YaHei"/>
+                <a:cs typeface="Microsoft YaHei"/>
+                <a:hlinkClick r:id="rId4"/>
+              </a:rPr>
+              <a:t> · 682 行附近</a:t>
             </a:r>
           </a:p>
         </p:txBody>
@@ -47334,7 +48236,19 @@
                 <a:cs typeface="Microsoft YaHei"/>
                 <a:hlinkClick r:id="rId3"/>
               </a:rPr>
-              <a:t>官方说明：doc/build/cmake-ref/module/extensions.rst</a:t>
+              <a:t>官方说明：</a:t>
+            </a:r>
+            <a:r>
+              <a:rPr sz="1275" b="0">
+                <a:solidFill>
+                  <a:srgbClr val="0070C0"/>
+                </a:solidFill>
+                <a:latin typeface="Microsoft YaHei"/>
+                <a:ea typeface="Microsoft YaHei"/>
+                <a:cs typeface="Microsoft YaHei"/>
+                <a:hlinkClick r:id="rId3"/>
+              </a:rPr>
+              <a:t>doc/build/cmake-ref/module/extensions.rst</a:t>
             </a:r>
           </a:p>
         </p:txBody>
@@ -47403,7 +48317,31 @@
                 <a:cs typeface="Microsoft YaHei"/>
                 <a:hlinkClick r:id="rId4"/>
               </a:rPr>
-              <a:t>实现定位：cmake/modules/extensions.cmake · 769 行附近</a:t>
+              <a:t>实现定位：</a:t>
+            </a:r>
+            <a:r>
+              <a:rPr sz="1275" b="0">
+                <a:solidFill>
+                  <a:srgbClr val="0070C0"/>
+                </a:solidFill>
+                <a:latin typeface="Microsoft YaHei"/>
+                <a:ea typeface="Microsoft YaHei"/>
+                <a:cs typeface="Microsoft YaHei"/>
+                <a:hlinkClick r:id="rId4"/>
+              </a:rPr>
+              <a:t>cmake/modules/extensions.cmake</a:t>
+            </a:r>
+            <a:r>
+              <a:rPr sz="1275" b="0">
+                <a:solidFill>
+                  <a:srgbClr val="397589"/>
+                </a:solidFill>
+                <a:latin typeface="Microsoft YaHei"/>
+                <a:ea typeface="Microsoft YaHei"/>
+                <a:cs typeface="Microsoft YaHei"/>
+                <a:hlinkClick r:id="rId4"/>
+              </a:rPr>
+              <a:t> · 769 行附近</a:t>
             </a:r>
           </a:p>
         </p:txBody>
